--- a/docs/앱-사용법-봉사자-인도자.pptx
+++ b/docs/앱-사용법-봉사자-인도자.pptx
@@ -19,11 +19,12 @@
     <p:sldId id="267" r:id="rId13"/>
     <p:sldId id="268" r:id="rId14"/>
     <p:sldId id="269" r:id="rId15"/>
-    <p:sldId id="270" r:id="rId16"/>
-    <p:sldId id="271" r:id="rId17"/>
-    <p:sldId id="272" r:id="rId18"/>
-    <p:sldId id="273" r:id="rId19"/>
-    <p:sldId id="274" r:id="rId20"/>
+    <p:sldId id="275" r:id="rId16"/>
+    <p:sldId id="270" r:id="rId17"/>
+    <p:sldId id="271" r:id="rId18"/>
+    <p:sldId id="272" r:id="rId19"/>
+    <p:sldId id="273" r:id="rId20"/>
+    <p:sldId id="274" r:id="rId21"/>
   </p:sldIdLst>
   <p:sldSz cx="12192000" cy="6858000"/>
   <p:notesSz cx="6858000" cy="9144000"/>
@@ -320,7 +321,7 @@
           <a:p>
             <a:fld id="{5BCAD085-E8A6-8845-BD4E-CB4CCA059FC4}" type="datetimeFigureOut">
               <a:rPr lang="en-US" smtClean="0"/>
-              <a:t>6/13/26</a:t>
+              <a:t>6/27/26</a:t>
             </a:fld>
             <a:endParaRPr lang="en-US"/>
           </a:p>
@@ -488,7 +489,7 @@
           <a:p>
             <a:fld id="{5BCAD085-E8A6-8845-BD4E-CB4CCA059FC4}" type="datetimeFigureOut">
               <a:rPr lang="en-US" smtClean="0"/>
-              <a:t>6/13/26</a:t>
+              <a:t>6/27/26</a:t>
             </a:fld>
             <a:endParaRPr lang="en-US"/>
           </a:p>
@@ -666,7 +667,7 @@
           <a:p>
             <a:fld id="{5BCAD085-E8A6-8845-BD4E-CB4CCA059FC4}" type="datetimeFigureOut">
               <a:rPr lang="en-US" smtClean="0"/>
-              <a:t>6/13/26</a:t>
+              <a:t>6/27/26</a:t>
             </a:fld>
             <a:endParaRPr lang="en-US"/>
           </a:p>
@@ -834,7 +835,7 @@
           <a:p>
             <a:fld id="{5BCAD085-E8A6-8845-BD4E-CB4CCA059FC4}" type="datetimeFigureOut">
               <a:rPr lang="en-US" smtClean="0"/>
-              <a:t>6/13/26</a:t>
+              <a:t>6/27/26</a:t>
             </a:fld>
             <a:endParaRPr lang="en-US"/>
           </a:p>
@@ -1079,7 +1080,7 @@
           <a:p>
             <a:fld id="{5BCAD085-E8A6-8845-BD4E-CB4CCA059FC4}" type="datetimeFigureOut">
               <a:rPr lang="en-US" smtClean="0"/>
-              <a:t>6/13/26</a:t>
+              <a:t>6/27/26</a:t>
             </a:fld>
             <a:endParaRPr lang="en-US"/>
           </a:p>
@@ -1364,7 +1365,7 @@
           <a:p>
             <a:fld id="{5BCAD085-E8A6-8845-BD4E-CB4CCA059FC4}" type="datetimeFigureOut">
               <a:rPr lang="en-US" smtClean="0"/>
-              <a:t>6/13/26</a:t>
+              <a:t>6/27/26</a:t>
             </a:fld>
             <a:endParaRPr lang="en-US"/>
           </a:p>
@@ -1783,7 +1784,7 @@
           <a:p>
             <a:fld id="{5BCAD085-E8A6-8845-BD4E-CB4CCA059FC4}" type="datetimeFigureOut">
               <a:rPr lang="en-US" smtClean="0"/>
-              <a:t>6/13/26</a:t>
+              <a:t>6/27/26</a:t>
             </a:fld>
             <a:endParaRPr lang="en-US"/>
           </a:p>
@@ -1900,7 +1901,7 @@
           <a:p>
             <a:fld id="{5BCAD085-E8A6-8845-BD4E-CB4CCA059FC4}" type="datetimeFigureOut">
               <a:rPr lang="en-US" smtClean="0"/>
-              <a:t>6/13/26</a:t>
+              <a:t>6/27/26</a:t>
             </a:fld>
             <a:endParaRPr lang="en-US"/>
           </a:p>
@@ -1995,7 +1996,7 @@
           <a:p>
             <a:fld id="{5BCAD085-E8A6-8845-BD4E-CB4CCA059FC4}" type="datetimeFigureOut">
               <a:rPr lang="en-US" smtClean="0"/>
-              <a:t>6/13/26</a:t>
+              <a:t>6/27/26</a:t>
             </a:fld>
             <a:endParaRPr lang="en-US"/>
           </a:p>
@@ -2270,7 +2271,7 @@
           <a:p>
             <a:fld id="{5BCAD085-E8A6-8845-BD4E-CB4CCA059FC4}" type="datetimeFigureOut">
               <a:rPr lang="en-US" smtClean="0"/>
-              <a:t>6/13/26</a:t>
+              <a:t>6/27/26</a:t>
             </a:fld>
             <a:endParaRPr lang="en-US"/>
           </a:p>
@@ -2522,7 +2523,7 @@
           <a:p>
             <a:fld id="{5BCAD085-E8A6-8845-BD4E-CB4CCA059FC4}" type="datetimeFigureOut">
               <a:rPr lang="en-US" smtClean="0"/>
-              <a:t>6/13/26</a:t>
+              <a:t>6/27/26</a:t>
             </a:fld>
             <a:endParaRPr lang="en-US"/>
           </a:p>
@@ -2733,7 +2734,7 @@
           <a:p>
             <a:fld id="{5BCAD085-E8A6-8845-BD4E-CB4CCA059FC4}" type="datetimeFigureOut">
               <a:rPr lang="en-US" smtClean="0"/>
-              <a:t>6/13/26</a:t>
+              <a:t>6/27/26</a:t>
             </a:fld>
             <a:endParaRPr lang="en-US"/>
           </a:p>
@@ -3332,7 +3333,7 @@
         </p:nvSpPr>
         <p:spPr>
           <a:xfrm>
-            <a:off x="0" y="0"/>
+            <a:off x="0" y="228600"/>
             <a:ext cx="12191695" cy="6858000"/>
           </a:xfrm>
           <a:prstGeom prst="rect">
@@ -3697,6 +3698,36 @@
           </a:p>
         </p:txBody>
       </p:sp>
+      <p:pic>
+        <p:nvPicPr>
+          <p:cNvPr id="10" name="그림 9" descr="텍스트, 스크린샷, 도표, 지도이(가) 표시된 사진&#10;&#10;AI 생성 콘텐츠는 정확하지 않을 수 있습니다.">
+            <a:extLst>
+              <a:ext uri="{FF2B5EF4-FFF2-40B4-BE49-F238E27FC236}">
+                <a16:creationId xmlns:a16="http://schemas.microsoft.com/office/drawing/2014/main" id="{2B8ED32C-7AAD-4A12-4F2D-AC3B96F5BB52}"/>
+              </a:ext>
+            </a:extLst>
+          </p:cNvPr>
+          <p:cNvPicPr>
+            <a:picLocks noChangeAspect="1"/>
+          </p:cNvPicPr>
+          <p:nvPr/>
+        </p:nvPicPr>
+        <p:blipFill>
+          <a:blip r:embed="rId2"/>
+          <a:stretch>
+            <a:fillRect/>
+          </a:stretch>
+        </p:blipFill>
+        <p:spPr>
+          <a:xfrm>
+            <a:off x="7675233" y="0"/>
+            <a:ext cx="3968127" cy="6858000"/>
+          </a:xfrm>
+          <a:prstGeom prst="rect">
+            <a:avLst/>
+          </a:prstGeom>
+        </p:spPr>
+      </p:pic>
     </p:spTree>
   </p:cSld>
   <p:clrMapOvr>
@@ -4059,6 +4090,36 @@
           </a:p>
         </p:txBody>
       </p:sp>
+      <p:pic>
+        <p:nvPicPr>
+          <p:cNvPr id="9" name="그림 8" descr="텍스트, 스크린샷, 폰트, 라인이(가) 표시된 사진&#10;&#10;AI 생성 콘텐츠는 정확하지 않을 수 있습니다.">
+            <a:extLst>
+              <a:ext uri="{FF2B5EF4-FFF2-40B4-BE49-F238E27FC236}">
+                <a16:creationId xmlns:a16="http://schemas.microsoft.com/office/drawing/2014/main" id="{8C514290-CBEB-0B44-8BB3-9762C695A96F}"/>
+              </a:ext>
+            </a:extLst>
+          </p:cNvPr>
+          <p:cNvPicPr>
+            <a:picLocks noChangeAspect="1"/>
+          </p:cNvPicPr>
+          <p:nvPr/>
+        </p:nvPicPr>
+        <p:blipFill>
+          <a:blip r:embed="rId2"/>
+          <a:stretch>
+            <a:fillRect/>
+          </a:stretch>
+        </p:blipFill>
+        <p:spPr>
+          <a:xfrm>
+            <a:off x="7955280" y="0"/>
+            <a:ext cx="3702338" cy="6858000"/>
+          </a:xfrm>
+          <a:prstGeom prst="rect">
+            <a:avLst/>
+          </a:prstGeom>
+        </p:spPr>
+      </p:pic>
     </p:spTree>
   </p:cSld>
   <p:clrMapOvr>
@@ -4939,6 +5000,36 @@
           </a:p>
         </p:txBody>
       </p:sp>
+      <p:pic>
+        <p:nvPicPr>
+          <p:cNvPr id="9" name="그림 8" descr="텍스트, 스크린샷, 폰트, 번호이(가) 표시된 사진&#10;&#10;AI 생성 콘텐츠는 정확하지 않을 수 있습니다.">
+            <a:extLst>
+              <a:ext uri="{FF2B5EF4-FFF2-40B4-BE49-F238E27FC236}">
+                <a16:creationId xmlns:a16="http://schemas.microsoft.com/office/drawing/2014/main" id="{4A2E4A3C-90E1-ABF4-EEAC-CB0B450A350E}"/>
+              </a:ext>
+            </a:extLst>
+          </p:cNvPr>
+          <p:cNvPicPr>
+            <a:picLocks noChangeAspect="1"/>
+          </p:cNvPicPr>
+          <p:nvPr/>
+        </p:nvPicPr>
+        <p:blipFill>
+          <a:blip r:embed="rId2"/>
+          <a:stretch>
+            <a:fillRect/>
+          </a:stretch>
+        </p:blipFill>
+        <p:spPr>
+          <a:xfrm>
+            <a:off x="7955279" y="-5576"/>
+            <a:ext cx="3670086" cy="6863576"/>
+          </a:xfrm>
+          <a:prstGeom prst="rect">
+            <a:avLst/>
+          </a:prstGeom>
+        </p:spPr>
+      </p:pic>
     </p:spTree>
   </p:cSld>
   <p:clrMapOvr>
@@ -4952,7 +5043,13 @@
   <p:cSld>
     <p:spTree>
       <p:nvGrpSpPr>
-        <p:cNvPr id="1" name=""/>
+        <p:cNvPr id="1" name="">
+          <a:extLst>
+            <a:ext uri="{FF2B5EF4-FFF2-40B4-BE49-F238E27FC236}">
+              <a16:creationId xmlns:a16="http://schemas.microsoft.com/office/drawing/2014/main" id="{67EEEFE3-E04D-32D8-FDDF-18BD7E68DB8F}"/>
+            </a:ext>
+          </a:extLst>
+        </p:cNvPr>
         <p:cNvGrpSpPr/>
         <p:nvPr/>
       </p:nvGrpSpPr>
@@ -4966,7 +5063,13 @@
       </p:grpSpPr>
       <p:sp>
         <p:nvSpPr>
-          <p:cNvPr id="2" name="Rectangle 1"/>
+          <p:cNvPr id="2" name="Rectangle 1">
+            <a:extLst>
+              <a:ext uri="{FF2B5EF4-FFF2-40B4-BE49-F238E27FC236}">
+                <a16:creationId xmlns:a16="http://schemas.microsoft.com/office/drawing/2014/main" id="{7F65C24E-0E43-3C37-01F3-411F507DB227}"/>
+              </a:ext>
+            </a:extLst>
+          </p:cNvPr>
           <p:cNvSpPr/>
           <p:nvPr/>
         </p:nvSpPr>
@@ -5011,7 +5114,13 @@
       </p:sp>
       <p:sp>
         <p:nvSpPr>
-          <p:cNvPr id="3" name="Rectangle 2"/>
+          <p:cNvPr id="3" name="Rectangle 2">
+            <a:extLst>
+              <a:ext uri="{FF2B5EF4-FFF2-40B4-BE49-F238E27FC236}">
+                <a16:creationId xmlns:a16="http://schemas.microsoft.com/office/drawing/2014/main" id="{01E7D05A-3497-3474-2F83-78F4F975CD5B}"/>
+              </a:ext>
+            </a:extLst>
+          </p:cNvPr>
           <p:cNvSpPr/>
           <p:nvPr/>
         </p:nvSpPr>
@@ -5056,7 +5165,13 @@
       </p:sp>
       <p:sp>
         <p:nvSpPr>
-          <p:cNvPr id="4" name="TextBox 3"/>
+          <p:cNvPr id="4" name="TextBox 3">
+            <a:extLst>
+              <a:ext uri="{FF2B5EF4-FFF2-40B4-BE49-F238E27FC236}">
+                <a16:creationId xmlns:a16="http://schemas.microsoft.com/office/drawing/2014/main" id="{90F3D78A-1CF5-334E-21EE-2592F5E2B2BE}"/>
+              </a:ext>
+            </a:extLst>
+          </p:cNvPr>
           <p:cNvSpPr txBox="1"/>
           <p:nvPr/>
         </p:nvSpPr>
@@ -5090,14 +5205,20 @@
                 <a:ea typeface="Apple SD Gothic Neo"/>
                 <a:cs typeface="Apple SD Gothic Neo"/>
               </a:rPr>
-              <a:t>[구역] 탭</a:t>
-            </a:r>
-          </a:p>
-        </p:txBody>
-      </p:sp>
-      <p:sp>
-        <p:nvSpPr>
-          <p:cNvPr id="5" name="TextBox 4"/>
+              <a:t>인도자는 이게 더 있어요</a:t>
+            </a:r>
+          </a:p>
+        </p:txBody>
+      </p:sp>
+      <p:sp>
+        <p:nvSpPr>
+          <p:cNvPr id="5" name="TextBox 4">
+            <a:extLst>
+              <a:ext uri="{FF2B5EF4-FFF2-40B4-BE49-F238E27FC236}">
+                <a16:creationId xmlns:a16="http://schemas.microsoft.com/office/drawing/2014/main" id="{656F3885-2DE6-5BCA-B7C5-2B302D36849F}"/>
+              </a:ext>
+            </a:extLst>
+          </p:cNvPr>
           <p:cNvSpPr txBox="1"/>
           <p:nvPr/>
         </p:nvSpPr>
@@ -5131,7 +5252,7 @@
                 <a:ea typeface="Apple SD Gothic Neo"/>
                 <a:cs typeface="Apple SD Gothic Neo"/>
               </a:rPr>
-              <a:t>①  구역 탭</a:t>
+              <a:t>봉사자 기능 전부 +</a:t>
             </a:r>
           </a:p>
           <a:p>
@@ -5149,7 +5270,7 @@
                 <a:ea typeface="Apple SD Gothic Neo"/>
                 <a:cs typeface="Apple SD Gothic Neo"/>
               </a:rPr>
-              <a:t>②  구·동 또는 검색으로 좁히기</a:t>
+              <a:t>[구역] 탭 (전체 구역 보기)</a:t>
             </a:r>
           </a:p>
           <a:p>
@@ -5167,32 +5288,20 @@
                 <a:ea typeface="Apple SD Gothic Neo"/>
                 <a:cs typeface="Apple SD Gothic Neo"/>
               </a:rPr>
-              <a:t>③  카드·지도 확인</a:t>
-            </a:r>
-          </a:p>
-          <a:p>
-            <a:pPr algn="l">
-              <a:spcAft>
-                <a:spcPts val="600"/>
-              </a:spcAft>
-            </a:pPr>
-            <a:r>
-              <a:rPr sz="1600" b="0">
-                <a:solidFill>
-                  <a:srgbClr val="B45A09"/>
-                </a:solidFill>
-                <a:latin typeface="Apple SD Gothic Neo"/>
-                <a:ea typeface="Apple SD Gothic Neo"/>
-                <a:cs typeface="Apple SD Gothic Neo"/>
-              </a:rPr>
-              <a:t>💡 "나의봉사"가 내 것만이라면, "구역"은 전체를 봅니다.</a:t>
-            </a:r>
-          </a:p>
-        </p:txBody>
-      </p:sp>
-      <p:sp>
-        <p:nvSpPr>
-          <p:cNvPr id="6" name="Rounded Rectangle 5"/>
+              <a:t>캘린더에서 배정하기</a:t>
+            </a:r>
+          </a:p>
+        </p:txBody>
+      </p:sp>
+      <p:sp>
+        <p:nvSpPr>
+          <p:cNvPr id="6" name="Rounded Rectangle 5">
+            <a:extLst>
+              <a:ext uri="{FF2B5EF4-FFF2-40B4-BE49-F238E27FC236}">
+                <a16:creationId xmlns:a16="http://schemas.microsoft.com/office/drawing/2014/main" id="{36C14ECF-FB45-3CB8-58BA-532AE09661DF}"/>
+              </a:ext>
+            </a:extLst>
+          </p:cNvPr>
           <p:cNvSpPr/>
           <p:nvPr/>
         </p:nvSpPr>
@@ -5239,7 +5348,13 @@
       </p:sp>
       <p:sp>
         <p:nvSpPr>
-          <p:cNvPr id="7" name="TextBox 6"/>
+          <p:cNvPr id="7" name="TextBox 6">
+            <a:extLst>
+              <a:ext uri="{FF2B5EF4-FFF2-40B4-BE49-F238E27FC236}">
+                <a16:creationId xmlns:a16="http://schemas.microsoft.com/office/drawing/2014/main" id="{61D55439-4EDD-2446-801D-48AEBF1EE900}"/>
+              </a:ext>
+            </a:extLst>
+          </p:cNvPr>
           <p:cNvSpPr txBox="1"/>
           <p:nvPr/>
         </p:nvSpPr>
@@ -5280,7 +5395,13 @@
       </p:sp>
       <p:sp>
         <p:nvSpPr>
-          <p:cNvPr id="8" name="TextBox 7"/>
+          <p:cNvPr id="8" name="TextBox 7">
+            <a:extLst>
+              <a:ext uri="{FF2B5EF4-FFF2-40B4-BE49-F238E27FC236}">
+                <a16:creationId xmlns:a16="http://schemas.microsoft.com/office/drawing/2014/main" id="{B485103C-C8BA-99DA-E273-E310F1E983C7}"/>
+              </a:ext>
+            </a:extLst>
+          </p:cNvPr>
           <p:cNvSpPr txBox="1"/>
           <p:nvPr/>
         </p:nvSpPr>
@@ -5314,12 +5435,47 @@
                 <a:ea typeface="Apple SD Gothic Neo"/>
                 <a:cs typeface="Apple SD Gothic Neo"/>
               </a:rPr>
-              <a:t>구역 목록</a:t>
-            </a:r>
-          </a:p>
-        </p:txBody>
-      </p:sp>
+              <a:t>—</a:t>
+            </a:r>
+          </a:p>
+        </p:txBody>
+      </p:sp>
+      <p:pic>
+        <p:nvPicPr>
+          <p:cNvPr id="9" name="그림 8" descr="텍스트, 스크린샷, 폰트, 번호이(가) 표시된 사진&#10;&#10;AI 생성 콘텐츠는 정확하지 않을 수 있습니다.">
+            <a:extLst>
+              <a:ext uri="{FF2B5EF4-FFF2-40B4-BE49-F238E27FC236}">
+                <a16:creationId xmlns:a16="http://schemas.microsoft.com/office/drawing/2014/main" id="{7D0A2CF9-2EA7-B96E-956E-89D4B13DDD64}"/>
+              </a:ext>
+            </a:extLst>
+          </p:cNvPr>
+          <p:cNvPicPr>
+            <a:picLocks noChangeAspect="1"/>
+          </p:cNvPicPr>
+          <p:nvPr/>
+        </p:nvPicPr>
+        <p:blipFill>
+          <a:blip r:embed="rId2"/>
+          <a:stretch>
+            <a:fillRect/>
+          </a:stretch>
+        </p:blipFill>
+        <p:spPr>
+          <a:xfrm>
+            <a:off x="7955279" y="-5576"/>
+            <a:ext cx="3670086" cy="6863576"/>
+          </a:xfrm>
+          <a:prstGeom prst="rect">
+            <a:avLst/>
+          </a:prstGeom>
+        </p:spPr>
+      </p:pic>
     </p:spTree>
+    <p:extLst>
+      <p:ext uri="{BB962C8B-B14F-4D97-AF65-F5344CB8AC3E}">
+        <p14:creationId xmlns:p14="http://schemas.microsoft.com/office/powerpoint/2010/main" val="120440208"/>
+      </p:ext>
+    </p:extLst>
   </p:cSld>
   <p:clrMapOvr>
     <a:masterClrMapping/>
@@ -5470,7 +5626,7 @@
                 <a:ea typeface="Apple SD Gothic Neo"/>
                 <a:cs typeface="Apple SD Gothic Neo"/>
               </a:rPr>
-              <a:t>[캘린더] 배정하기  ★인도자 핵심</a:t>
+              <a:t>[구역] 탭</a:t>
             </a:r>
           </a:p>
         </p:txBody>
@@ -5511,7 +5667,7 @@
                 <a:ea typeface="Apple SD Gothic Neo"/>
                 <a:cs typeface="Apple SD Gothic Neo"/>
               </a:rPr>
-              <a:t>①  일정 열기 → 배정 들어가기</a:t>
+              <a:t>①  구역 탭</a:t>
             </a:r>
           </a:p>
           <a:p>
@@ -5529,7 +5685,7 @@
                 <a:ea typeface="Apple SD Gothic Neo"/>
                 <a:cs typeface="Apple SD Gothic Neo"/>
               </a:rPr>
-              <a:t>②  사람을 골라 "묶기"로 팀 만들기</a:t>
+              <a:t>②  구·동 또는 검색으로 좁히기</a:t>
             </a:r>
           </a:p>
           <a:p>
@@ -5547,30 +5703,12 @@
                 <a:ea typeface="Apple SD Gothic Neo"/>
                 <a:cs typeface="Apple SD Gothic Neo"/>
               </a:rPr>
-              <a:t>③  팀의 › 눌러 구역 나누기</a:t>
+              <a:t>③  카드·지도 확인</a:t>
             </a:r>
           </a:p>
           <a:p>
             <a:pPr algn="l">
               <a:spcAft>
-                <a:spcPts val="1000"/>
-              </a:spcAft>
-            </a:pPr>
-            <a:r>
-              <a:rPr sz="1900" b="0">
-                <a:solidFill>
-                  <a:srgbClr val="1C1C1A"/>
-                </a:solidFill>
-                <a:latin typeface="Apple SD Gothic Neo"/>
-                <a:ea typeface="Apple SD Gothic Neo"/>
-                <a:cs typeface="Apple SD Gothic Neo"/>
-              </a:rPr>
-              <a:t>④  마지막에 "배정 공유"</a:t>
-            </a:r>
-          </a:p>
-          <a:p>
-            <a:pPr algn="l">
-              <a:spcAft>
                 <a:spcPts val="600"/>
               </a:spcAft>
             </a:pPr>
@@ -5583,25 +5721,7 @@
                 <a:ea typeface="Apple SD Gothic Neo"/>
                 <a:cs typeface="Apple SD Gothic Neo"/>
               </a:rPr>
-              <a:t>💡 공유해야 팀원에게 알림이 갑니다.</a:t>
-            </a:r>
-          </a:p>
-          <a:p>
-            <a:pPr algn="l">
-              <a:spcAft>
-                <a:spcPts val="600"/>
-              </a:spcAft>
-            </a:pPr>
-            <a:r>
-              <a:rPr sz="1600" b="0">
-                <a:solidFill>
-                  <a:srgbClr val="B45A09"/>
-                </a:solidFill>
-                <a:latin typeface="Apple SD Gothic Neo"/>
-                <a:ea typeface="Apple SD Gothic Neo"/>
-                <a:cs typeface="Apple SD Gothic Neo"/>
-              </a:rPr>
-              <a:t>💡 인원이 많으면 검색(초성 ㄱㅁㅈ 가능).</a:t>
+              <a:t>💡 "나의봉사"가 내 것만이라면, "구역"은 전체를 봅니다.</a:t>
             </a:r>
           </a:p>
         </p:txBody>
@@ -5730,11 +5850,41 @@
                 <a:ea typeface="Apple SD Gothic Neo"/>
                 <a:cs typeface="Apple SD Gothic Neo"/>
               </a:rPr>
-              <a:t>팀짓기 / 구역배분</a:t>
-            </a:r>
-          </a:p>
-        </p:txBody>
-      </p:sp>
+              <a:t>구역 목록</a:t>
+            </a:r>
+          </a:p>
+        </p:txBody>
+      </p:sp>
+      <p:pic>
+        <p:nvPicPr>
+          <p:cNvPr id="9" name="그림 8" descr="텍스트, 스크린샷, 폰트, 번호이(가) 표시된 사진&#10;&#10;AI 생성 콘텐츠는 정확하지 않을 수 있습니다.">
+            <a:extLst>
+              <a:ext uri="{FF2B5EF4-FFF2-40B4-BE49-F238E27FC236}">
+                <a16:creationId xmlns:a16="http://schemas.microsoft.com/office/drawing/2014/main" id="{5A27478E-540C-2E2A-1598-B5007E663C45}"/>
+              </a:ext>
+            </a:extLst>
+          </p:cNvPr>
+          <p:cNvPicPr>
+            <a:picLocks noChangeAspect="1"/>
+          </p:cNvPicPr>
+          <p:nvPr/>
+        </p:nvPicPr>
+        <p:blipFill>
+          <a:blip r:embed="rId2"/>
+          <a:stretch>
+            <a:fillRect/>
+          </a:stretch>
+        </p:blipFill>
+        <p:spPr>
+          <a:xfrm>
+            <a:off x="7920071" y="5576"/>
+            <a:ext cx="3712472" cy="6858000"/>
+          </a:xfrm>
+          <a:prstGeom prst="rect">
+            <a:avLst/>
+          </a:prstGeom>
+        </p:spPr>
+      </p:pic>
     </p:spTree>
   </p:cSld>
   <p:clrMapOvr>
@@ -5886,7 +6036,7 @@
                 <a:ea typeface="Apple SD Gothic Neo"/>
                 <a:cs typeface="Apple SD Gothic Neo"/>
               </a:rPr>
-              <a:t>[나의봉사] — 오늘 내 봉사</a:t>
+              <a:t>[캘린더] 배정하기  ★인도자 핵심</a:t>
             </a:r>
           </a:p>
         </p:txBody>
@@ -5927,7 +6077,7 @@
                 <a:ea typeface="Apple SD Gothic Neo"/>
                 <a:cs typeface="Apple SD Gothic Neo"/>
               </a:rPr>
-              <a:t>①  오늘 배정된 팀·구역 확인</a:t>
+              <a:t>①  일정 열기 → 배정 들어가기</a:t>
             </a:r>
           </a:p>
           <a:p>
@@ -5945,12 +6095,48 @@
                 <a:ea typeface="Apple SD Gothic Neo"/>
                 <a:cs typeface="Apple SD Gothic Neo"/>
               </a:rPr>
-              <a:t>②  바로 지도/기록으로 이동</a:t>
+              <a:t>②  사람을 골라 "묶기"로 팀 만들기</a:t>
             </a:r>
           </a:p>
           <a:p>
             <a:pPr algn="l">
               <a:spcAft>
+                <a:spcPts val="1000"/>
+              </a:spcAft>
+            </a:pPr>
+            <a:r>
+              <a:rPr sz="1900" b="0">
+                <a:solidFill>
+                  <a:srgbClr val="1C1C1A"/>
+                </a:solidFill>
+                <a:latin typeface="Apple SD Gothic Neo"/>
+                <a:ea typeface="Apple SD Gothic Neo"/>
+                <a:cs typeface="Apple SD Gothic Neo"/>
+              </a:rPr>
+              <a:t>③  팀의 › 눌러 구역 나누기</a:t>
+            </a:r>
+          </a:p>
+          <a:p>
+            <a:pPr algn="l">
+              <a:spcAft>
+                <a:spcPts val="1000"/>
+              </a:spcAft>
+            </a:pPr>
+            <a:r>
+              <a:rPr sz="1900" b="0">
+                <a:solidFill>
+                  <a:srgbClr val="1C1C1A"/>
+                </a:solidFill>
+                <a:latin typeface="Apple SD Gothic Neo"/>
+                <a:ea typeface="Apple SD Gothic Neo"/>
+                <a:cs typeface="Apple SD Gothic Neo"/>
+              </a:rPr>
+              <a:t>④  마지막에 "배정 공유"</a:t>
+            </a:r>
+          </a:p>
+          <a:p>
+            <a:pPr algn="l">
+              <a:spcAft>
                 <a:spcPts val="600"/>
               </a:spcAft>
             </a:pPr>
@@ -5963,7 +6149,25 @@
                 <a:ea typeface="Apple SD Gothic Neo"/>
                 <a:cs typeface="Apple SD Gothic Neo"/>
               </a:rPr>
-              <a:t>💡 배정을 받으면 알림이 와요.</a:t>
+              <a:t>💡 공유해야 팀원에게 알림이 갑니다.</a:t>
+            </a:r>
+          </a:p>
+          <a:p>
+            <a:pPr algn="l">
+              <a:spcAft>
+                <a:spcPts val="600"/>
+              </a:spcAft>
+            </a:pPr>
+            <a:r>
+              <a:rPr sz="1600" b="0">
+                <a:solidFill>
+                  <a:srgbClr val="B45A09"/>
+                </a:solidFill>
+                <a:latin typeface="Apple SD Gothic Neo"/>
+                <a:ea typeface="Apple SD Gothic Neo"/>
+                <a:cs typeface="Apple SD Gothic Neo"/>
+              </a:rPr>
+              <a:t>💡 인원이 많으면 검색(초성 ㄱㅁㅈ 가능).</a:t>
             </a:r>
           </a:p>
         </p:txBody>
@@ -6092,7 +6296,7 @@
                 <a:ea typeface="Apple SD Gothic Neo"/>
                 <a:cs typeface="Apple SD Gothic Neo"/>
               </a:rPr>
-              <a:t>오늘 배정</a:t>
+              <a:t>팀짓기 / 구역배분</a:t>
             </a:r>
           </a:p>
         </p:txBody>
@@ -6137,7 +6341,7 @@
             <a:avLst/>
           </a:prstGeom>
           <a:solidFill>
-            <a:srgbClr val="F3F4F3"/>
+            <a:srgbClr val="FFFFFF"/>
           </a:solidFill>
           <a:ln>
             <a:noFill/>
@@ -6175,14 +6379,14 @@
         </p:nvSpPr>
         <p:spPr>
           <a:xfrm>
-            <a:off x="914400" y="2743200"/>
-            <a:ext cx="164592" cy="1280160"/>
+            <a:off x="0" y="0"/>
+            <a:ext cx="201168" cy="1371600"/>
           </a:xfrm>
           <a:prstGeom prst="rect">
             <a:avLst/>
           </a:prstGeom>
           <a:solidFill>
-            <a:srgbClr val="6B7280"/>
+            <a:srgbClr val="EA580C"/>
           </a:solidFill>
           <a:ln>
             <a:noFill/>
@@ -6220,8 +6424,173 @@
         </p:nvSpPr>
         <p:spPr>
           <a:xfrm>
-            <a:off x="1280160" y="2743200"/>
-            <a:ext cx="9601200" cy="1280160"/>
+            <a:off x="548640" y="411480"/>
+            <a:ext cx="7315200" cy="914400"/>
+          </a:xfrm>
+          <a:prstGeom prst="rect">
+            <a:avLst/>
+          </a:prstGeom>
+          <a:noFill/>
+        </p:spPr>
+        <p:txBody>
+          <a:bodyPr wrap="square" lIns="45720" tIns="27432" rIns="45720" bIns="27432" anchor="t">
+            <a:spAutoFit/>
+          </a:bodyPr>
+          <a:lstStyle/>
+          <a:p>
+            <a:pPr algn="l">
+              <a:spcAft>
+                <a:spcPts val="600"/>
+              </a:spcAft>
+            </a:pPr>
+            <a:r>
+              <a:rPr sz="3000" b="1">
+                <a:solidFill>
+                  <a:srgbClr val="1C1C1A"/>
+                </a:solidFill>
+                <a:latin typeface="Apple SD Gothic Neo"/>
+                <a:ea typeface="Apple SD Gothic Neo"/>
+                <a:cs typeface="Apple SD Gothic Neo"/>
+              </a:rPr>
+              <a:t>[나의봉사] — 오늘 내 봉사</a:t>
+            </a:r>
+          </a:p>
+        </p:txBody>
+      </p:sp>
+      <p:sp>
+        <p:nvSpPr>
+          <p:cNvPr id="5" name="TextBox 4"/>
+          <p:cNvSpPr txBox="1"/>
+          <p:nvPr/>
+        </p:nvSpPr>
+        <p:spPr>
+          <a:xfrm>
+            <a:off x="594360" y="1645920"/>
+            <a:ext cx="6766560" cy="4754880"/>
+          </a:xfrm>
+          <a:prstGeom prst="rect">
+            <a:avLst/>
+          </a:prstGeom>
+          <a:noFill/>
+        </p:spPr>
+        <p:txBody>
+          <a:bodyPr wrap="square" lIns="45720" tIns="27432" rIns="45720" bIns="27432" anchor="t">
+            <a:spAutoFit/>
+          </a:bodyPr>
+          <a:lstStyle/>
+          <a:p>
+            <a:pPr algn="l">
+              <a:spcAft>
+                <a:spcPts val="1000"/>
+              </a:spcAft>
+            </a:pPr>
+            <a:r>
+              <a:rPr sz="1900" b="0">
+                <a:solidFill>
+                  <a:srgbClr val="1C1C1A"/>
+                </a:solidFill>
+                <a:latin typeface="Apple SD Gothic Neo"/>
+                <a:ea typeface="Apple SD Gothic Neo"/>
+                <a:cs typeface="Apple SD Gothic Neo"/>
+              </a:rPr>
+              <a:t>①  오늘 배정된 팀·구역 확인</a:t>
+            </a:r>
+          </a:p>
+          <a:p>
+            <a:pPr algn="l">
+              <a:spcAft>
+                <a:spcPts val="1000"/>
+              </a:spcAft>
+            </a:pPr>
+            <a:r>
+              <a:rPr sz="1900" b="0">
+                <a:solidFill>
+                  <a:srgbClr val="1C1C1A"/>
+                </a:solidFill>
+                <a:latin typeface="Apple SD Gothic Neo"/>
+                <a:ea typeface="Apple SD Gothic Neo"/>
+                <a:cs typeface="Apple SD Gothic Neo"/>
+              </a:rPr>
+              <a:t>②  바로 지도/기록으로 이동</a:t>
+            </a:r>
+          </a:p>
+          <a:p>
+            <a:pPr algn="l">
+              <a:spcAft>
+                <a:spcPts val="600"/>
+              </a:spcAft>
+            </a:pPr>
+            <a:r>
+              <a:rPr sz="1600" b="0">
+                <a:solidFill>
+                  <a:srgbClr val="B45A09"/>
+                </a:solidFill>
+                <a:latin typeface="Apple SD Gothic Neo"/>
+                <a:ea typeface="Apple SD Gothic Neo"/>
+                <a:cs typeface="Apple SD Gothic Neo"/>
+              </a:rPr>
+              <a:t>💡 배정을 받으면 알림이 와요.</a:t>
+            </a:r>
+          </a:p>
+        </p:txBody>
+      </p:sp>
+      <p:sp>
+        <p:nvSpPr>
+          <p:cNvPr id="6" name="Rounded Rectangle 5"/>
+          <p:cNvSpPr/>
+          <p:nvPr/>
+        </p:nvSpPr>
+        <p:spPr>
+          <a:xfrm>
+            <a:off x="7955279" y="1645920"/>
+            <a:ext cx="3566160" cy="4572000"/>
+          </a:xfrm>
+          <a:prstGeom prst="roundRect">
+            <a:avLst/>
+          </a:prstGeom>
+          <a:solidFill>
+            <a:srgbClr val="ECEEEC"/>
+          </a:solidFill>
+          <a:ln w="12700">
+            <a:solidFill>
+              <a:srgbClr val="C9CDC9"/>
+            </a:solidFill>
+          </a:ln>
+          <a:effectLst/>
+        </p:spPr>
+        <p:style>
+          <a:lnRef idx="1">
+            <a:schemeClr val="accent1"/>
+          </a:lnRef>
+          <a:fillRef idx="3">
+            <a:schemeClr val="accent1"/>
+          </a:fillRef>
+          <a:effectRef idx="2">
+            <a:schemeClr val="accent1"/>
+          </a:effectRef>
+          <a:fontRef idx="minor">
+            <a:schemeClr val="lt1"/>
+          </a:fontRef>
+        </p:style>
+        <p:txBody>
+          <a:bodyPr rtlCol="0" anchor="ctr"/>
+          <a:lstStyle/>
+          <a:p>
+            <a:pPr algn="ctr"/>
+            <a:endParaRPr/>
+          </a:p>
+        </p:txBody>
+      </p:sp>
+      <p:sp>
+        <p:nvSpPr>
+          <p:cNvPr id="7" name="TextBox 6"/>
+          <p:cNvSpPr txBox="1"/>
+          <p:nvPr/>
+        </p:nvSpPr>
+        <p:spPr>
+          <a:xfrm>
+            <a:off x="7955279" y="3657600"/>
+            <a:ext cx="3566160" cy="548640"/>
           </a:xfrm>
           <a:prstGeom prst="rect">
             <a:avLst/>
@@ -6234,25 +6603,96 @@
           </a:bodyPr>
           <a:lstStyle/>
           <a:p>
-            <a:pPr algn="l">
+            <a:pPr algn="ctr">
               <a:spcAft>
                 <a:spcPts val="600"/>
               </a:spcAft>
             </a:pPr>
             <a:r>
-              <a:rPr sz="3400" b="1">
-                <a:solidFill>
-                  <a:srgbClr val="1C1C1A"/>
-                </a:solidFill>
-                <a:latin typeface="Apple SD Gothic Neo"/>
-                <a:ea typeface="Apple SD Gothic Neo"/>
-                <a:cs typeface="Apple SD Gothic Neo"/>
-              </a:rPr>
-              <a:t>마무리</a:t>
-            </a:r>
-          </a:p>
-        </p:txBody>
-      </p:sp>
+              <a:rPr sz="1400" b="0">
+                <a:solidFill>
+                  <a:srgbClr val="6B7280"/>
+                </a:solidFill>
+                <a:latin typeface="Apple SD Gothic Neo"/>
+                <a:ea typeface="Apple SD Gothic Neo"/>
+                <a:cs typeface="Apple SD Gothic Neo"/>
+              </a:rPr>
+              <a:t>📷 스크린샷 넣기</a:t>
+            </a:r>
+          </a:p>
+        </p:txBody>
+      </p:sp>
+      <p:sp>
+        <p:nvSpPr>
+          <p:cNvPr id="8" name="TextBox 7"/>
+          <p:cNvSpPr txBox="1"/>
+          <p:nvPr/>
+        </p:nvSpPr>
+        <p:spPr>
+          <a:xfrm>
+            <a:off x="7955279" y="4069080"/>
+            <a:ext cx="3566160" cy="457200"/>
+          </a:xfrm>
+          <a:prstGeom prst="rect">
+            <a:avLst/>
+          </a:prstGeom>
+          <a:noFill/>
+        </p:spPr>
+        <p:txBody>
+          <a:bodyPr wrap="square" lIns="45720" tIns="27432" rIns="45720" bIns="27432" anchor="ctr">
+            <a:spAutoFit/>
+          </a:bodyPr>
+          <a:lstStyle/>
+          <a:p>
+            <a:pPr algn="ctr">
+              <a:spcAft>
+                <a:spcPts val="600"/>
+              </a:spcAft>
+            </a:pPr>
+            <a:r>
+              <a:rPr sz="1100" b="0">
+                <a:solidFill>
+                  <a:srgbClr val="6B7280"/>
+                </a:solidFill>
+                <a:latin typeface="Apple SD Gothic Neo"/>
+                <a:ea typeface="Apple SD Gothic Neo"/>
+                <a:cs typeface="Apple SD Gothic Neo"/>
+              </a:rPr>
+              <a:t>오늘 배정</a:t>
+            </a:r>
+          </a:p>
+        </p:txBody>
+      </p:sp>
+      <p:pic>
+        <p:nvPicPr>
+          <p:cNvPr id="9" name="그림 8" descr="텍스트, 스크린샷, 폰트, 번호이(가) 표시된 사진&#10;&#10;AI 생성 콘텐츠는 정확하지 않을 수 있습니다.">
+            <a:extLst>
+              <a:ext uri="{FF2B5EF4-FFF2-40B4-BE49-F238E27FC236}">
+                <a16:creationId xmlns:a16="http://schemas.microsoft.com/office/drawing/2014/main" id="{DC7EE1C7-CA3B-8267-9005-BB7E40E7690B}"/>
+              </a:ext>
+            </a:extLst>
+          </p:cNvPr>
+          <p:cNvPicPr>
+            <a:picLocks noChangeAspect="1"/>
+          </p:cNvPicPr>
+          <p:nvPr/>
+        </p:nvPicPr>
+        <p:blipFill>
+          <a:blip r:embed="rId2"/>
+          <a:stretch>
+            <a:fillRect/>
+          </a:stretch>
+        </p:blipFill>
+        <p:spPr>
+          <a:xfrm>
+            <a:off x="7863840" y="0"/>
+            <a:ext cx="3678511" cy="6858000"/>
+          </a:xfrm>
+          <a:prstGeom prst="rect">
+            <a:avLst/>
+          </a:prstGeom>
+        </p:spPr>
+      </p:pic>
     </p:spTree>
   </p:cSld>
   <p:clrMapOvr>
@@ -6293,7 +6733,7 @@
             <a:avLst/>
           </a:prstGeom>
           <a:solidFill>
-            <a:srgbClr val="FFFFFF"/>
+            <a:srgbClr val="F3F4F3"/>
           </a:solidFill>
           <a:ln>
             <a:noFill/>
@@ -6331,8 +6771,8 @@
         </p:nvSpPr>
         <p:spPr>
           <a:xfrm>
-            <a:off x="0" y="0"/>
-            <a:ext cx="201168" cy="1371600"/>
+            <a:off x="914400" y="2743200"/>
+            <a:ext cx="164592" cy="1280160"/>
           </a:xfrm>
           <a:prstGeom prst="rect">
             <a:avLst/>
@@ -6376,173 +6816,8 @@
         </p:nvSpPr>
         <p:spPr>
           <a:xfrm>
-            <a:off x="548640" y="411480"/>
-            <a:ext cx="7315200" cy="914400"/>
-          </a:xfrm>
-          <a:prstGeom prst="rect">
-            <a:avLst/>
-          </a:prstGeom>
-          <a:noFill/>
-        </p:spPr>
-        <p:txBody>
-          <a:bodyPr wrap="square" lIns="45720" tIns="27432" rIns="45720" bIns="27432" anchor="t">
-            <a:spAutoFit/>
-          </a:bodyPr>
-          <a:lstStyle/>
-          <a:p>
-            <a:pPr algn="l">
-              <a:spcAft>
-                <a:spcPts val="600"/>
-              </a:spcAft>
-            </a:pPr>
-            <a:r>
-              <a:rPr sz="3000" b="1">
-                <a:solidFill>
-                  <a:srgbClr val="1C1C1A"/>
-                </a:solidFill>
-                <a:latin typeface="Apple SD Gothic Neo"/>
-                <a:ea typeface="Apple SD Gothic Neo"/>
-                <a:cs typeface="Apple SD Gothic Neo"/>
-              </a:rPr>
-              <a:t>자주 묻는 질문 (FAQ)</a:t>
-            </a:r>
-          </a:p>
-        </p:txBody>
-      </p:sp>
-      <p:sp>
-        <p:nvSpPr>
-          <p:cNvPr id="5" name="TextBox 4"/>
-          <p:cNvSpPr txBox="1"/>
-          <p:nvPr/>
-        </p:nvSpPr>
-        <p:spPr>
-          <a:xfrm>
-            <a:off x="594360" y="1645920"/>
-            <a:ext cx="6766560" cy="4754880"/>
-          </a:xfrm>
-          <a:prstGeom prst="rect">
-            <a:avLst/>
-          </a:prstGeom>
-          <a:noFill/>
-        </p:spPr>
-        <p:txBody>
-          <a:bodyPr wrap="square" lIns="45720" tIns="27432" rIns="45720" bIns="27432" anchor="t">
-            <a:spAutoFit/>
-          </a:bodyPr>
-          <a:lstStyle/>
-          <a:p>
-            <a:pPr algn="l">
-              <a:spcAft>
-                <a:spcPts val="1000"/>
-              </a:spcAft>
-            </a:pPr>
-            <a:r>
-              <a:rPr sz="1900" b="0">
-                <a:solidFill>
-                  <a:srgbClr val="1C1C1A"/>
-                </a:solidFill>
-                <a:latin typeface="Apple SD Gothic Neo"/>
-                <a:ea typeface="Apple SD Gothic Neo"/>
-                <a:cs typeface="Apple SD Gothic Neo"/>
-              </a:rPr>
-              <a:t>로그인이 안 돼요  →  아이디/비번 확인, 관리자에 초기화 요청</a:t>
-            </a:r>
-          </a:p>
-          <a:p>
-            <a:pPr algn="l">
-              <a:spcAft>
-                <a:spcPts val="1000"/>
-              </a:spcAft>
-            </a:pPr>
-            <a:r>
-              <a:rPr sz="1900" b="0">
-                <a:solidFill>
-                  <a:srgbClr val="1C1C1A"/>
-                </a:solidFill>
-                <a:latin typeface="Apple SD Gothic Neo"/>
-                <a:ea typeface="Apple SD Gothic Neo"/>
-                <a:cs typeface="Apple SD Gothic Neo"/>
-              </a:rPr>
-              <a:t>화면이 안 바뀌어요  →  화면을 아래로 당겨 새로고침</a:t>
-            </a:r>
-          </a:p>
-          <a:p>
-            <a:pPr algn="l">
-              <a:spcAft>
-                <a:spcPts val="1000"/>
-              </a:spcAft>
-            </a:pPr>
-            <a:r>
-              <a:rPr sz="1900" b="0">
-                <a:solidFill>
-                  <a:srgbClr val="1C1C1A"/>
-                </a:solidFill>
-                <a:latin typeface="Apple SD Gothic Neo"/>
-                <a:ea typeface="Apple SD Gothic Neo"/>
-                <a:cs typeface="Apple SD Gothic Neo"/>
-              </a:rPr>
-              <a:t>알림이 안 와요  →  설정에서 알림 허용 + 앱 설치</a:t>
-            </a:r>
-          </a:p>
-        </p:txBody>
-      </p:sp>
-      <p:sp>
-        <p:nvSpPr>
-          <p:cNvPr id="6" name="Rounded Rectangle 5"/>
-          <p:cNvSpPr/>
-          <p:nvPr/>
-        </p:nvSpPr>
-        <p:spPr>
-          <a:xfrm>
-            <a:off x="7955279" y="1645920"/>
-            <a:ext cx="3566160" cy="4572000"/>
-          </a:xfrm>
-          <a:prstGeom prst="roundRect">
-            <a:avLst/>
-          </a:prstGeom>
-          <a:solidFill>
-            <a:srgbClr val="ECEEEC"/>
-          </a:solidFill>
-          <a:ln w="12700">
-            <a:solidFill>
-              <a:srgbClr val="C9CDC9"/>
-            </a:solidFill>
-          </a:ln>
-          <a:effectLst/>
-        </p:spPr>
-        <p:style>
-          <a:lnRef idx="1">
-            <a:schemeClr val="accent1"/>
-          </a:lnRef>
-          <a:fillRef idx="3">
-            <a:schemeClr val="accent1"/>
-          </a:fillRef>
-          <a:effectRef idx="2">
-            <a:schemeClr val="accent1"/>
-          </a:effectRef>
-          <a:fontRef idx="minor">
-            <a:schemeClr val="lt1"/>
-          </a:fontRef>
-        </p:style>
-        <p:txBody>
-          <a:bodyPr rtlCol="0" anchor="ctr"/>
-          <a:lstStyle/>
-          <a:p>
-            <a:pPr algn="ctr"/>
-            <a:endParaRPr/>
-          </a:p>
-        </p:txBody>
-      </p:sp>
-      <p:sp>
-        <p:nvSpPr>
-          <p:cNvPr id="7" name="TextBox 6"/>
-          <p:cNvSpPr txBox="1"/>
-          <p:nvPr/>
-        </p:nvSpPr>
-        <p:spPr>
-          <a:xfrm>
-            <a:off x="7955279" y="3657600"/>
-            <a:ext cx="3566160" cy="548640"/>
+            <a:off x="1280160" y="2743200"/>
+            <a:ext cx="9601200" cy="1280160"/>
           </a:xfrm>
           <a:prstGeom prst="rect">
             <a:avLst/>
@@ -6555,62 +6830,21 @@
           </a:bodyPr>
           <a:lstStyle/>
           <a:p>
-            <a:pPr algn="ctr">
+            <a:pPr algn="l">
               <a:spcAft>
                 <a:spcPts val="600"/>
               </a:spcAft>
             </a:pPr>
             <a:r>
-              <a:rPr sz="1400" b="0">
-                <a:solidFill>
-                  <a:srgbClr val="6B7280"/>
-                </a:solidFill>
-                <a:latin typeface="Apple SD Gothic Neo"/>
-                <a:ea typeface="Apple SD Gothic Neo"/>
-                <a:cs typeface="Apple SD Gothic Neo"/>
-              </a:rPr>
-              <a:t>📷 스크린샷 넣기</a:t>
-            </a:r>
-          </a:p>
-        </p:txBody>
-      </p:sp>
-      <p:sp>
-        <p:nvSpPr>
-          <p:cNvPr id="8" name="TextBox 7"/>
-          <p:cNvSpPr txBox="1"/>
-          <p:nvPr/>
-        </p:nvSpPr>
-        <p:spPr>
-          <a:xfrm>
-            <a:off x="7955279" y="4069080"/>
-            <a:ext cx="3566160" cy="457200"/>
-          </a:xfrm>
-          <a:prstGeom prst="rect">
-            <a:avLst/>
-          </a:prstGeom>
-          <a:noFill/>
-        </p:spPr>
-        <p:txBody>
-          <a:bodyPr wrap="square" lIns="45720" tIns="27432" rIns="45720" bIns="27432" anchor="ctr">
-            <a:spAutoFit/>
-          </a:bodyPr>
-          <a:lstStyle/>
-          <a:p>
-            <a:pPr algn="ctr">
-              <a:spcAft>
-                <a:spcPts val="600"/>
-              </a:spcAft>
-            </a:pPr>
-            <a:r>
-              <a:rPr sz="1100" b="0">
-                <a:solidFill>
-                  <a:srgbClr val="6B7280"/>
-                </a:solidFill>
-                <a:latin typeface="Apple SD Gothic Neo"/>
-                <a:ea typeface="Apple SD Gothic Neo"/>
-                <a:cs typeface="Apple SD Gothic Neo"/>
-              </a:rPr>
-              <a:t>—</a:t>
+              <a:rPr sz="3400" b="1">
+                <a:solidFill>
+                  <a:srgbClr val="1C1C1A"/>
+                </a:solidFill>
+                <a:latin typeface="Apple SD Gothic Neo"/>
+                <a:ea typeface="Apple SD Gothic Neo"/>
+                <a:cs typeface="Apple SD Gothic Neo"/>
+              </a:rPr>
+              <a:t>마무리</a:t>
             </a:r>
           </a:p>
         </p:txBody>
@@ -6779,6 +7013,368 @@
 </p:sld>
 </file>
 
+<file path=ppt/slides/slide20.xml><?xml version="1.0" encoding="utf-8"?>
+<p:sld xmlns:a="http://schemas.openxmlformats.org/drawingml/2006/main" xmlns:r="http://schemas.openxmlformats.org/officeDocument/2006/relationships" xmlns:p="http://schemas.openxmlformats.org/presentationml/2006/main">
+  <p:cSld>
+    <p:spTree>
+      <p:nvGrpSpPr>
+        <p:cNvPr id="1" name=""/>
+        <p:cNvGrpSpPr/>
+        <p:nvPr/>
+      </p:nvGrpSpPr>
+      <p:grpSpPr>
+        <a:xfrm>
+          <a:off x="0" y="0"/>
+          <a:ext cx="0" cy="0"/>
+          <a:chOff x="0" y="0"/>
+          <a:chExt cx="0" cy="0"/>
+        </a:xfrm>
+      </p:grpSpPr>
+      <p:sp>
+        <p:nvSpPr>
+          <p:cNvPr id="2" name="Rectangle 1"/>
+          <p:cNvSpPr/>
+          <p:nvPr/>
+        </p:nvSpPr>
+        <p:spPr>
+          <a:xfrm>
+            <a:off x="0" y="0"/>
+            <a:ext cx="12191695" cy="6858000"/>
+          </a:xfrm>
+          <a:prstGeom prst="rect">
+            <a:avLst/>
+          </a:prstGeom>
+          <a:solidFill>
+            <a:srgbClr val="FFFFFF"/>
+          </a:solidFill>
+          <a:ln>
+            <a:noFill/>
+          </a:ln>
+          <a:effectLst/>
+        </p:spPr>
+        <p:style>
+          <a:lnRef idx="1">
+            <a:schemeClr val="accent1"/>
+          </a:lnRef>
+          <a:fillRef idx="3">
+            <a:schemeClr val="accent1"/>
+          </a:fillRef>
+          <a:effectRef idx="2">
+            <a:schemeClr val="accent1"/>
+          </a:effectRef>
+          <a:fontRef idx="minor">
+            <a:schemeClr val="lt1"/>
+          </a:fontRef>
+        </p:style>
+        <p:txBody>
+          <a:bodyPr rtlCol="0" anchor="ctr"/>
+          <a:lstStyle/>
+          <a:p>
+            <a:pPr algn="ctr"/>
+            <a:endParaRPr/>
+          </a:p>
+        </p:txBody>
+      </p:sp>
+      <p:sp>
+        <p:nvSpPr>
+          <p:cNvPr id="3" name="Rectangle 2"/>
+          <p:cNvSpPr/>
+          <p:nvPr/>
+        </p:nvSpPr>
+        <p:spPr>
+          <a:xfrm>
+            <a:off x="0" y="0"/>
+            <a:ext cx="201168" cy="1371600"/>
+          </a:xfrm>
+          <a:prstGeom prst="rect">
+            <a:avLst/>
+          </a:prstGeom>
+          <a:solidFill>
+            <a:srgbClr val="6B7280"/>
+          </a:solidFill>
+          <a:ln>
+            <a:noFill/>
+          </a:ln>
+          <a:effectLst/>
+        </p:spPr>
+        <p:style>
+          <a:lnRef idx="1">
+            <a:schemeClr val="accent1"/>
+          </a:lnRef>
+          <a:fillRef idx="3">
+            <a:schemeClr val="accent1"/>
+          </a:fillRef>
+          <a:effectRef idx="2">
+            <a:schemeClr val="accent1"/>
+          </a:effectRef>
+          <a:fontRef idx="minor">
+            <a:schemeClr val="lt1"/>
+          </a:fontRef>
+        </p:style>
+        <p:txBody>
+          <a:bodyPr rtlCol="0" anchor="ctr"/>
+          <a:lstStyle/>
+          <a:p>
+            <a:pPr algn="ctr"/>
+            <a:endParaRPr/>
+          </a:p>
+        </p:txBody>
+      </p:sp>
+      <p:sp>
+        <p:nvSpPr>
+          <p:cNvPr id="4" name="TextBox 3"/>
+          <p:cNvSpPr txBox="1"/>
+          <p:nvPr/>
+        </p:nvSpPr>
+        <p:spPr>
+          <a:xfrm>
+            <a:off x="548640" y="411480"/>
+            <a:ext cx="7315200" cy="914400"/>
+          </a:xfrm>
+          <a:prstGeom prst="rect">
+            <a:avLst/>
+          </a:prstGeom>
+          <a:noFill/>
+        </p:spPr>
+        <p:txBody>
+          <a:bodyPr wrap="square" lIns="45720" tIns="27432" rIns="45720" bIns="27432" anchor="t">
+            <a:spAutoFit/>
+          </a:bodyPr>
+          <a:lstStyle/>
+          <a:p>
+            <a:pPr algn="l">
+              <a:spcAft>
+                <a:spcPts val="600"/>
+              </a:spcAft>
+            </a:pPr>
+            <a:r>
+              <a:rPr sz="3000" b="1">
+                <a:solidFill>
+                  <a:srgbClr val="1C1C1A"/>
+                </a:solidFill>
+                <a:latin typeface="Apple SD Gothic Neo"/>
+                <a:ea typeface="Apple SD Gothic Neo"/>
+                <a:cs typeface="Apple SD Gothic Neo"/>
+              </a:rPr>
+              <a:t>자주 묻는 질문 (FAQ)</a:t>
+            </a:r>
+          </a:p>
+        </p:txBody>
+      </p:sp>
+      <p:sp>
+        <p:nvSpPr>
+          <p:cNvPr id="5" name="TextBox 4"/>
+          <p:cNvSpPr txBox="1"/>
+          <p:nvPr/>
+        </p:nvSpPr>
+        <p:spPr>
+          <a:xfrm>
+            <a:off x="594360" y="1645920"/>
+            <a:ext cx="6766560" cy="4754880"/>
+          </a:xfrm>
+          <a:prstGeom prst="rect">
+            <a:avLst/>
+          </a:prstGeom>
+          <a:noFill/>
+        </p:spPr>
+        <p:txBody>
+          <a:bodyPr wrap="square" lIns="45720" tIns="27432" rIns="45720" bIns="27432" anchor="t">
+            <a:spAutoFit/>
+          </a:bodyPr>
+          <a:lstStyle/>
+          <a:p>
+            <a:pPr algn="l">
+              <a:spcAft>
+                <a:spcPts val="1000"/>
+              </a:spcAft>
+            </a:pPr>
+            <a:r>
+              <a:rPr sz="1900" b="0">
+                <a:solidFill>
+                  <a:srgbClr val="1C1C1A"/>
+                </a:solidFill>
+                <a:latin typeface="Apple SD Gothic Neo"/>
+                <a:ea typeface="Apple SD Gothic Neo"/>
+                <a:cs typeface="Apple SD Gothic Neo"/>
+              </a:rPr>
+              <a:t>로그인이 안 돼요  →  아이디/비번 확인, 관리자에 초기화 요청</a:t>
+            </a:r>
+          </a:p>
+          <a:p>
+            <a:pPr algn="l">
+              <a:spcAft>
+                <a:spcPts val="1000"/>
+              </a:spcAft>
+            </a:pPr>
+            <a:r>
+              <a:rPr sz="1900" b="0">
+                <a:solidFill>
+                  <a:srgbClr val="1C1C1A"/>
+                </a:solidFill>
+                <a:latin typeface="Apple SD Gothic Neo"/>
+                <a:ea typeface="Apple SD Gothic Neo"/>
+                <a:cs typeface="Apple SD Gothic Neo"/>
+              </a:rPr>
+              <a:t>화면이 안 바뀌어요  →  화면을 아래로 당겨 새로고침</a:t>
+            </a:r>
+          </a:p>
+          <a:p>
+            <a:pPr algn="l">
+              <a:spcAft>
+                <a:spcPts val="1000"/>
+              </a:spcAft>
+            </a:pPr>
+            <a:r>
+              <a:rPr sz="1900" b="0">
+                <a:solidFill>
+                  <a:srgbClr val="1C1C1A"/>
+                </a:solidFill>
+                <a:latin typeface="Apple SD Gothic Neo"/>
+                <a:ea typeface="Apple SD Gothic Neo"/>
+                <a:cs typeface="Apple SD Gothic Neo"/>
+              </a:rPr>
+              <a:t>알림이 안 와요  →  설정에서 알림 허용 + 앱 설치</a:t>
+            </a:r>
+          </a:p>
+        </p:txBody>
+      </p:sp>
+      <p:sp>
+        <p:nvSpPr>
+          <p:cNvPr id="6" name="Rounded Rectangle 5"/>
+          <p:cNvSpPr/>
+          <p:nvPr/>
+        </p:nvSpPr>
+        <p:spPr>
+          <a:xfrm>
+            <a:off x="7955279" y="1645920"/>
+            <a:ext cx="3566160" cy="4572000"/>
+          </a:xfrm>
+          <a:prstGeom prst="roundRect">
+            <a:avLst/>
+          </a:prstGeom>
+          <a:solidFill>
+            <a:srgbClr val="ECEEEC"/>
+          </a:solidFill>
+          <a:ln w="12700">
+            <a:solidFill>
+              <a:srgbClr val="C9CDC9"/>
+            </a:solidFill>
+          </a:ln>
+          <a:effectLst/>
+        </p:spPr>
+        <p:style>
+          <a:lnRef idx="1">
+            <a:schemeClr val="accent1"/>
+          </a:lnRef>
+          <a:fillRef idx="3">
+            <a:schemeClr val="accent1"/>
+          </a:fillRef>
+          <a:effectRef idx="2">
+            <a:schemeClr val="accent1"/>
+          </a:effectRef>
+          <a:fontRef idx="minor">
+            <a:schemeClr val="lt1"/>
+          </a:fontRef>
+        </p:style>
+        <p:txBody>
+          <a:bodyPr rtlCol="0" anchor="ctr"/>
+          <a:lstStyle/>
+          <a:p>
+            <a:pPr algn="ctr"/>
+            <a:endParaRPr/>
+          </a:p>
+        </p:txBody>
+      </p:sp>
+      <p:sp>
+        <p:nvSpPr>
+          <p:cNvPr id="7" name="TextBox 6"/>
+          <p:cNvSpPr txBox="1"/>
+          <p:nvPr/>
+        </p:nvSpPr>
+        <p:spPr>
+          <a:xfrm>
+            <a:off x="7955279" y="3657600"/>
+            <a:ext cx="3566160" cy="548640"/>
+          </a:xfrm>
+          <a:prstGeom prst="rect">
+            <a:avLst/>
+          </a:prstGeom>
+          <a:noFill/>
+        </p:spPr>
+        <p:txBody>
+          <a:bodyPr wrap="square" lIns="45720" tIns="27432" rIns="45720" bIns="27432" anchor="ctr">
+            <a:spAutoFit/>
+          </a:bodyPr>
+          <a:lstStyle/>
+          <a:p>
+            <a:pPr algn="ctr">
+              <a:spcAft>
+                <a:spcPts val="600"/>
+              </a:spcAft>
+            </a:pPr>
+            <a:r>
+              <a:rPr sz="1400" b="0">
+                <a:solidFill>
+                  <a:srgbClr val="6B7280"/>
+                </a:solidFill>
+                <a:latin typeface="Apple SD Gothic Neo"/>
+                <a:ea typeface="Apple SD Gothic Neo"/>
+                <a:cs typeface="Apple SD Gothic Neo"/>
+              </a:rPr>
+              <a:t>📷 스크린샷 넣기</a:t>
+            </a:r>
+          </a:p>
+        </p:txBody>
+      </p:sp>
+      <p:sp>
+        <p:nvSpPr>
+          <p:cNvPr id="8" name="TextBox 7"/>
+          <p:cNvSpPr txBox="1"/>
+          <p:nvPr/>
+        </p:nvSpPr>
+        <p:spPr>
+          <a:xfrm>
+            <a:off x="7955279" y="4069080"/>
+            <a:ext cx="3566160" cy="457200"/>
+          </a:xfrm>
+          <a:prstGeom prst="rect">
+            <a:avLst/>
+          </a:prstGeom>
+          <a:noFill/>
+        </p:spPr>
+        <p:txBody>
+          <a:bodyPr wrap="square" lIns="45720" tIns="27432" rIns="45720" bIns="27432" anchor="ctr">
+            <a:spAutoFit/>
+          </a:bodyPr>
+          <a:lstStyle/>
+          <a:p>
+            <a:pPr algn="ctr">
+              <a:spcAft>
+                <a:spcPts val="600"/>
+              </a:spcAft>
+            </a:pPr>
+            <a:r>
+              <a:rPr sz="1100" b="0">
+                <a:solidFill>
+                  <a:srgbClr val="6B7280"/>
+                </a:solidFill>
+                <a:latin typeface="Apple SD Gothic Neo"/>
+                <a:ea typeface="Apple SD Gothic Neo"/>
+                <a:cs typeface="Apple SD Gothic Neo"/>
+              </a:rPr>
+              <a:t>—</a:t>
+            </a:r>
+          </a:p>
+        </p:txBody>
+      </p:sp>
+    </p:spTree>
+  </p:cSld>
+  <p:clrMapOvr>
+    <a:masterClrMapping/>
+  </p:clrMapOvr>
+</p:sld>
+</file>
+
 <file path=ppt/slides/slide3.xml><?xml version="1.0" encoding="utf-8"?>
 <p:sld xmlns:a="http://schemas.openxmlformats.org/drawingml/2006/main" xmlns:r="http://schemas.openxmlformats.org/officeDocument/2006/relationships" xmlns:p="http://schemas.openxmlformats.org/presentationml/2006/main">
   <p:cSld>
@@ -7677,7 +8273,7 @@
         </p:nvSpPr>
         <p:spPr>
           <a:xfrm>
-            <a:off x="594360" y="1645920"/>
+            <a:off x="591638" y="1645920"/>
             <a:ext cx="6766560" cy="4754880"/>
           </a:xfrm>
           <a:prstGeom prst="rect">
@@ -7875,6 +8471,37 @@
           </a:p>
         </p:txBody>
       </p:sp>
+      <p:pic>
+        <p:nvPicPr>
+          <p:cNvPr id="9" name="그림 8" descr="텍스트, 스크린샷, 폰트, 번호이(가) 표시된 사진&#10;&#10;AI 생성 콘텐츠는 정확하지 않을 수 있습니다.">
+            <a:extLst>
+              <a:ext uri="{FF2B5EF4-FFF2-40B4-BE49-F238E27FC236}">
+                <a16:creationId xmlns:a16="http://schemas.microsoft.com/office/drawing/2014/main" id="{D672D742-6C36-39F5-0ED9-D49B52CE7283}"/>
+              </a:ext>
+            </a:extLst>
+          </p:cNvPr>
+          <p:cNvPicPr>
+            <a:picLocks noChangeAspect="1"/>
+          </p:cNvPicPr>
+          <p:nvPr/>
+        </p:nvPicPr>
+        <p:blipFill>
+          <a:blip r:embed="rId2"/>
+          <a:srcRect t="6858" r="287" b="1543"/>
+          <a:stretch>
+            <a:fillRect/>
+          </a:stretch>
+        </p:blipFill>
+        <p:spPr>
+          <a:xfrm>
+            <a:off x="7955279" y="0"/>
+            <a:ext cx="3645083" cy="6858000"/>
+          </a:xfrm>
+          <a:prstGeom prst="rect">
+            <a:avLst/>
+          </a:prstGeom>
+        </p:spPr>
+      </p:pic>
     </p:spTree>
   </p:cSld>
   <p:clrMapOvr>
@@ -8613,7 +9240,7 @@
               </a:spcAft>
             </a:pPr>
             <a:r>
-              <a:rPr sz="1900" b="0">
+              <a:rPr sz="1900" b="0" dirty="0">
                 <a:solidFill>
                   <a:srgbClr val="1C1C1A"/>
                 </a:solidFill>
@@ -8621,8 +9248,49 @@
                 <a:ea typeface="Apple SD Gothic Neo"/>
                 <a:cs typeface="Apple SD Gothic Neo"/>
               </a:rPr>
-              <a:t>①  날짜 누르기</a:t>
-            </a:r>
+              <a:t>①  </a:t>
+            </a:r>
+            <a:r>
+              <a:rPr sz="1900" b="0" dirty="0" err="1">
+                <a:solidFill>
+                  <a:srgbClr val="1C1C1A"/>
+                </a:solidFill>
+                <a:latin typeface="Apple SD Gothic Neo"/>
+                <a:ea typeface="Apple SD Gothic Neo"/>
+                <a:cs typeface="Apple SD Gothic Neo"/>
+              </a:rPr>
+              <a:t>날짜</a:t>
+            </a:r>
+            <a:r>
+              <a:rPr sz="1900" b="0" dirty="0">
+                <a:solidFill>
+                  <a:srgbClr val="1C1C1A"/>
+                </a:solidFill>
+                <a:latin typeface="Apple SD Gothic Neo"/>
+                <a:ea typeface="Apple SD Gothic Neo"/>
+                <a:cs typeface="Apple SD Gothic Neo"/>
+              </a:rPr>
+              <a:t> </a:t>
+            </a:r>
+            <a:r>
+              <a:rPr sz="1900" b="0" dirty="0" err="1">
+                <a:solidFill>
+                  <a:srgbClr val="1C1C1A"/>
+                </a:solidFill>
+                <a:latin typeface="Apple SD Gothic Neo"/>
+                <a:ea typeface="Apple SD Gothic Neo"/>
+                <a:cs typeface="Apple SD Gothic Neo"/>
+              </a:rPr>
+              <a:t>누르기</a:t>
+            </a:r>
+            <a:endParaRPr sz="1900" b="0" dirty="0">
+              <a:solidFill>
+                <a:srgbClr val="1C1C1A"/>
+              </a:solidFill>
+              <a:latin typeface="Apple SD Gothic Neo"/>
+              <a:ea typeface="Apple SD Gothic Neo"/>
+              <a:cs typeface="Apple SD Gothic Neo"/>
+            </a:endParaRPr>
           </a:p>
           <a:p>
             <a:pPr algn="l">
@@ -8631,7 +9299,7 @@
               </a:spcAft>
             </a:pPr>
             <a:r>
-              <a:rPr sz="1900" b="0">
+              <a:rPr sz="1900" b="0" dirty="0">
                 <a:solidFill>
                   <a:srgbClr val="1C1C1A"/>
                 </a:solidFill>
@@ -8639,8 +9307,71 @@
                 <a:ea typeface="Apple SD Gothic Neo"/>
                 <a:cs typeface="Apple SD Gothic Neo"/>
               </a:rPr>
-              <a:t>②  그날 일정 누르기</a:t>
-            </a:r>
+              <a:t>②  </a:t>
+            </a:r>
+            <a:r>
+              <a:rPr sz="1900" b="0" dirty="0" err="1">
+                <a:solidFill>
+                  <a:srgbClr val="1C1C1A"/>
+                </a:solidFill>
+                <a:latin typeface="Apple SD Gothic Neo"/>
+                <a:ea typeface="Apple SD Gothic Neo"/>
+                <a:cs typeface="Apple SD Gothic Neo"/>
+              </a:rPr>
+              <a:t>그날</a:t>
+            </a:r>
+            <a:r>
+              <a:rPr sz="1900" b="0" dirty="0">
+                <a:solidFill>
+                  <a:srgbClr val="1C1C1A"/>
+                </a:solidFill>
+                <a:latin typeface="Apple SD Gothic Neo"/>
+                <a:ea typeface="Apple SD Gothic Neo"/>
+                <a:cs typeface="Apple SD Gothic Neo"/>
+              </a:rPr>
+              <a:t> </a:t>
+            </a:r>
+            <a:r>
+              <a:rPr sz="1900" b="0" dirty="0" err="1">
+                <a:solidFill>
+                  <a:srgbClr val="1C1C1A"/>
+                </a:solidFill>
+                <a:latin typeface="Apple SD Gothic Neo"/>
+                <a:ea typeface="Apple SD Gothic Neo"/>
+                <a:cs typeface="Apple SD Gothic Neo"/>
+              </a:rPr>
+              <a:t>일정</a:t>
+            </a:r>
+            <a:r>
+              <a:rPr sz="1900" b="0" dirty="0">
+                <a:solidFill>
+                  <a:srgbClr val="1C1C1A"/>
+                </a:solidFill>
+                <a:latin typeface="Apple SD Gothic Neo"/>
+                <a:ea typeface="Apple SD Gothic Neo"/>
+                <a:cs typeface="Apple SD Gothic Neo"/>
+              </a:rPr>
+              <a:t> </a:t>
+            </a:r>
+            <a:r>
+              <a:rPr sz="1900" b="0" dirty="0" err="1">
+                <a:solidFill>
+                  <a:srgbClr val="1C1C1A"/>
+                </a:solidFill>
+                <a:latin typeface="Apple SD Gothic Neo"/>
+                <a:ea typeface="Apple SD Gothic Neo"/>
+                <a:cs typeface="Apple SD Gothic Neo"/>
+              </a:rPr>
+              <a:t>누르기</a:t>
+            </a:r>
+            <a:endParaRPr sz="1900" b="0" dirty="0">
+              <a:solidFill>
+                <a:srgbClr val="1C1C1A"/>
+              </a:solidFill>
+              <a:latin typeface="Apple SD Gothic Neo"/>
+              <a:ea typeface="Apple SD Gothic Neo"/>
+              <a:cs typeface="Apple SD Gothic Neo"/>
+            </a:endParaRPr>
           </a:p>
           <a:p>
             <a:pPr algn="l">
@@ -8649,7 +9380,7 @@
               </a:spcAft>
             </a:pPr>
             <a:r>
-              <a:rPr sz="1900" b="0">
+              <a:rPr sz="1900" b="0" dirty="0">
                 <a:solidFill>
                   <a:srgbClr val="1C1C1A"/>
                 </a:solidFill>
@@ -8657,7 +9388,95 @@
                 <a:ea typeface="Apple SD Gothic Neo"/>
                 <a:cs typeface="Apple SD Gothic Neo"/>
               </a:rPr>
-              <a:t>③  "신청하기" (취소도 같은 자리)</a:t>
+              <a:t>③  "</a:t>
+            </a:r>
+            <a:r>
+              <a:rPr sz="1900" b="0" dirty="0" err="1">
+                <a:solidFill>
+                  <a:srgbClr val="1C1C1A"/>
+                </a:solidFill>
+                <a:latin typeface="Apple SD Gothic Neo"/>
+                <a:ea typeface="Apple SD Gothic Neo"/>
+                <a:cs typeface="Apple SD Gothic Neo"/>
+              </a:rPr>
+              <a:t>신청하기</a:t>
+            </a:r>
+            <a:r>
+              <a:rPr sz="1900" b="0" dirty="0">
+                <a:solidFill>
+                  <a:srgbClr val="1C1C1A"/>
+                </a:solidFill>
+                <a:latin typeface="Apple SD Gothic Neo"/>
+                <a:ea typeface="Apple SD Gothic Neo"/>
+                <a:cs typeface="Apple SD Gothic Neo"/>
+              </a:rPr>
+              <a:t>" (</a:t>
+            </a:r>
+            <a:r>
+              <a:rPr sz="1900" b="0" dirty="0" err="1">
+                <a:solidFill>
+                  <a:srgbClr val="1C1C1A"/>
+                </a:solidFill>
+                <a:latin typeface="Apple SD Gothic Neo"/>
+                <a:ea typeface="Apple SD Gothic Neo"/>
+                <a:cs typeface="Apple SD Gothic Neo"/>
+              </a:rPr>
+              <a:t>취소도</a:t>
+            </a:r>
+            <a:r>
+              <a:rPr sz="1900" b="0" dirty="0">
+                <a:solidFill>
+                  <a:srgbClr val="1C1C1A"/>
+                </a:solidFill>
+                <a:latin typeface="Apple SD Gothic Neo"/>
+                <a:ea typeface="Apple SD Gothic Neo"/>
+                <a:cs typeface="Apple SD Gothic Neo"/>
+              </a:rPr>
+              <a:t> </a:t>
+            </a:r>
+            <a:r>
+              <a:rPr sz="1900" b="0" dirty="0" err="1">
+                <a:solidFill>
+                  <a:srgbClr val="1C1C1A"/>
+                </a:solidFill>
+                <a:latin typeface="Apple SD Gothic Neo"/>
+                <a:ea typeface="Apple SD Gothic Neo"/>
+                <a:cs typeface="Apple SD Gothic Neo"/>
+              </a:rPr>
+              <a:t>같은</a:t>
+            </a:r>
+            <a:r>
+              <a:rPr sz="1900" b="0" dirty="0">
+                <a:solidFill>
+                  <a:srgbClr val="1C1C1A"/>
+                </a:solidFill>
+                <a:latin typeface="Apple SD Gothic Neo"/>
+                <a:ea typeface="Apple SD Gothic Neo"/>
+                <a:cs typeface="Apple SD Gothic Neo"/>
+              </a:rPr>
+              <a:t> </a:t>
+            </a:r>
+            <a:r>
+              <a:rPr sz="1900" b="0" dirty="0" err="1">
+                <a:solidFill>
+                  <a:srgbClr val="1C1C1A"/>
+                </a:solidFill>
+                <a:latin typeface="Apple SD Gothic Neo"/>
+                <a:ea typeface="Apple SD Gothic Neo"/>
+                <a:cs typeface="Apple SD Gothic Neo"/>
+              </a:rPr>
+              <a:t>자리</a:t>
+            </a:r>
+            <a:r>
+              <a:rPr sz="1900" b="0" dirty="0">
+                <a:solidFill>
+                  <a:srgbClr val="1C1C1A"/>
+                </a:solidFill>
+                <a:latin typeface="Apple SD Gothic Neo"/>
+                <a:ea typeface="Apple SD Gothic Neo"/>
+                <a:cs typeface="Apple SD Gothic Neo"/>
+              </a:rPr>
+              <a:t>)</a:t>
             </a:r>
           </a:p>
           <a:p>
@@ -8667,7 +9486,7 @@
               </a:spcAft>
             </a:pPr>
             <a:r>
-              <a:rPr sz="1600" b="0">
+              <a:rPr sz="1600" b="0" dirty="0">
                 <a:solidFill>
                   <a:srgbClr val="B45A09"/>
                 </a:solidFill>
@@ -8675,7 +9494,139 @@
                 <a:ea typeface="Apple SD Gothic Neo"/>
                 <a:cs typeface="Apple SD Gothic Neo"/>
               </a:rPr>
-              <a:t>💡 일정 안에서 채팅·참가자도 볼 수 있어요.</a:t>
+              <a:t>💡 </a:t>
+            </a:r>
+            <a:r>
+              <a:rPr sz="1600" b="0" dirty="0" err="1">
+                <a:solidFill>
+                  <a:srgbClr val="B45A09"/>
+                </a:solidFill>
+                <a:latin typeface="Apple SD Gothic Neo"/>
+                <a:ea typeface="Apple SD Gothic Neo"/>
+                <a:cs typeface="Apple SD Gothic Neo"/>
+              </a:rPr>
+              <a:t>일정</a:t>
+            </a:r>
+            <a:r>
+              <a:rPr sz="1600" b="0" dirty="0">
+                <a:solidFill>
+                  <a:srgbClr val="B45A09"/>
+                </a:solidFill>
+                <a:latin typeface="Apple SD Gothic Neo"/>
+                <a:ea typeface="Apple SD Gothic Neo"/>
+                <a:cs typeface="Apple SD Gothic Neo"/>
+              </a:rPr>
+              <a:t> </a:t>
+            </a:r>
+            <a:r>
+              <a:rPr sz="1600" b="0" dirty="0" err="1">
+                <a:solidFill>
+                  <a:srgbClr val="B45A09"/>
+                </a:solidFill>
+                <a:latin typeface="Apple SD Gothic Neo"/>
+                <a:ea typeface="Apple SD Gothic Neo"/>
+                <a:cs typeface="Apple SD Gothic Neo"/>
+              </a:rPr>
+              <a:t>안에서</a:t>
+            </a:r>
+            <a:r>
+              <a:rPr sz="1600" b="0" dirty="0">
+                <a:solidFill>
+                  <a:srgbClr val="B45A09"/>
+                </a:solidFill>
+                <a:latin typeface="Apple SD Gothic Neo"/>
+                <a:ea typeface="Apple SD Gothic Neo"/>
+                <a:cs typeface="Apple SD Gothic Neo"/>
+              </a:rPr>
+              <a:t> </a:t>
+            </a:r>
+            <a:r>
+              <a:rPr sz="1600" b="0" dirty="0" err="1">
+                <a:solidFill>
+                  <a:srgbClr val="B45A09"/>
+                </a:solidFill>
+                <a:latin typeface="Apple SD Gothic Neo"/>
+                <a:ea typeface="Apple SD Gothic Neo"/>
+                <a:cs typeface="Apple SD Gothic Neo"/>
+              </a:rPr>
+              <a:t>채팅·참가자도</a:t>
+            </a:r>
+            <a:r>
+              <a:rPr sz="1600" b="0" dirty="0">
+                <a:solidFill>
+                  <a:srgbClr val="B45A09"/>
+                </a:solidFill>
+                <a:latin typeface="Apple SD Gothic Neo"/>
+                <a:ea typeface="Apple SD Gothic Neo"/>
+                <a:cs typeface="Apple SD Gothic Neo"/>
+              </a:rPr>
+              <a:t> </a:t>
+            </a:r>
+            <a:r>
+              <a:rPr sz="1600" b="0" dirty="0" err="1">
+                <a:solidFill>
+                  <a:srgbClr val="B45A09"/>
+                </a:solidFill>
+                <a:latin typeface="Apple SD Gothic Neo"/>
+                <a:ea typeface="Apple SD Gothic Neo"/>
+                <a:cs typeface="Apple SD Gothic Neo"/>
+              </a:rPr>
+              <a:t>볼</a:t>
+            </a:r>
+            <a:r>
+              <a:rPr sz="1600" b="0" dirty="0">
+                <a:solidFill>
+                  <a:srgbClr val="B45A09"/>
+                </a:solidFill>
+                <a:latin typeface="Apple SD Gothic Neo"/>
+                <a:ea typeface="Apple SD Gothic Neo"/>
+                <a:cs typeface="Apple SD Gothic Neo"/>
+              </a:rPr>
+              <a:t> </a:t>
+            </a:r>
+            <a:r>
+              <a:rPr sz="1600" b="0" dirty="0" err="1">
+                <a:solidFill>
+                  <a:srgbClr val="B45A09"/>
+                </a:solidFill>
+                <a:latin typeface="Apple SD Gothic Neo"/>
+                <a:ea typeface="Apple SD Gothic Neo"/>
+                <a:cs typeface="Apple SD Gothic Neo"/>
+              </a:rPr>
+              <a:t>수</a:t>
+            </a:r>
+            <a:r>
+              <a:rPr sz="1600" b="0" dirty="0">
+                <a:solidFill>
+                  <a:srgbClr val="B45A09"/>
+                </a:solidFill>
+                <a:latin typeface="Apple SD Gothic Neo"/>
+                <a:ea typeface="Apple SD Gothic Neo"/>
+                <a:cs typeface="Apple SD Gothic Neo"/>
+              </a:rPr>
+              <a:t> </a:t>
+            </a:r>
+            <a:r>
+              <a:rPr sz="1600" b="0" dirty="0" err="1">
+                <a:solidFill>
+                  <a:srgbClr val="B45A09"/>
+                </a:solidFill>
+                <a:latin typeface="Apple SD Gothic Neo"/>
+                <a:ea typeface="Apple SD Gothic Neo"/>
+                <a:cs typeface="Apple SD Gothic Neo"/>
+              </a:rPr>
+              <a:t>있어요</a:t>
+            </a:r>
+            <a:r>
+              <a:rPr sz="1600" b="0" dirty="0">
+                <a:solidFill>
+                  <a:srgbClr val="B45A09"/>
+                </a:solidFill>
+                <a:latin typeface="Apple SD Gothic Neo"/>
+                <a:ea typeface="Apple SD Gothic Neo"/>
+                <a:cs typeface="Apple SD Gothic Neo"/>
+              </a:rPr>
+              <a:t>.</a:t>
             </a:r>
           </a:p>
         </p:txBody>
@@ -9189,6 +10140,36 @@
           </a:p>
         </p:txBody>
       </p:sp>
+      <p:pic>
+        <p:nvPicPr>
+          <p:cNvPr id="9" name="그림 8" descr="텍스트, 스크린샷, 폰트, 라인이(가) 표시된 사진&#10;&#10;AI 생성 콘텐츠는 정확하지 않을 수 있습니다.">
+            <a:extLst>
+              <a:ext uri="{FF2B5EF4-FFF2-40B4-BE49-F238E27FC236}">
+                <a16:creationId xmlns:a16="http://schemas.microsoft.com/office/drawing/2014/main" id="{29E1981A-C7CC-E8D2-0464-B25676FDAA67}"/>
+              </a:ext>
+            </a:extLst>
+          </p:cNvPr>
+          <p:cNvPicPr>
+            <a:picLocks noChangeAspect="1"/>
+          </p:cNvPicPr>
+          <p:nvPr/>
+        </p:nvPicPr>
+        <p:blipFill>
+          <a:blip r:embed="rId2"/>
+          <a:stretch>
+            <a:fillRect/>
+          </a:stretch>
+        </p:blipFill>
+        <p:spPr>
+          <a:xfrm>
+            <a:off x="7955279" y="126124"/>
+            <a:ext cx="3566160" cy="6605751"/>
+          </a:xfrm>
+          <a:prstGeom prst="rect">
+            <a:avLst/>
+          </a:prstGeom>
+        </p:spPr>
+      </p:pic>
     </p:spTree>
   </p:cSld>
   <p:clrMapOvr>
